--- a/images/institutions.pptx
+++ b/images/institutions.pptx
@@ -6,6 +6,8 @@
   </p:sldMasterIdLst>
   <p:sldIdLst>
     <p:sldId id="256" r:id="rId2"/>
+    <p:sldId id="257" r:id="rId3"/>
+    <p:sldId id="258" r:id="rId4"/>
   </p:sldIdLst>
   <p:sldSz cx="12192000" cy="6858000"/>
   <p:notesSz cx="6858000" cy="9144000"/>
@@ -270,7 +272,7 @@
           <a:p>
             <a:fld id="{6D0C7B07-A814-1641-8AF5-F439CD6A131D}" type="datetimeFigureOut">
               <a:rPr lang="en-US" smtClean="0"/>
-              <a:t>4/1/23</a:t>
+              <a:t>1/23/26</a:t>
             </a:fld>
             <a:endParaRPr lang="en-US"/>
           </a:p>
@@ -468,7 +470,7 @@
           <a:p>
             <a:fld id="{6D0C7B07-A814-1641-8AF5-F439CD6A131D}" type="datetimeFigureOut">
               <a:rPr lang="en-US" smtClean="0"/>
-              <a:t>4/1/23</a:t>
+              <a:t>1/23/26</a:t>
             </a:fld>
             <a:endParaRPr lang="en-US"/>
           </a:p>
@@ -676,7 +678,7 @@
           <a:p>
             <a:fld id="{6D0C7B07-A814-1641-8AF5-F439CD6A131D}" type="datetimeFigureOut">
               <a:rPr lang="en-US" smtClean="0"/>
-              <a:t>4/1/23</a:t>
+              <a:t>1/23/26</a:t>
             </a:fld>
             <a:endParaRPr lang="en-US"/>
           </a:p>
@@ -874,7 +876,7 @@
           <a:p>
             <a:fld id="{6D0C7B07-A814-1641-8AF5-F439CD6A131D}" type="datetimeFigureOut">
               <a:rPr lang="en-US" smtClean="0"/>
-              <a:t>4/1/23</a:t>
+              <a:t>1/23/26</a:t>
             </a:fld>
             <a:endParaRPr lang="en-US"/>
           </a:p>
@@ -1149,7 +1151,7 @@
           <a:p>
             <a:fld id="{6D0C7B07-A814-1641-8AF5-F439CD6A131D}" type="datetimeFigureOut">
               <a:rPr lang="en-US" smtClean="0"/>
-              <a:t>4/1/23</a:t>
+              <a:t>1/23/26</a:t>
             </a:fld>
             <a:endParaRPr lang="en-US"/>
           </a:p>
@@ -1414,7 +1416,7 @@
           <a:p>
             <a:fld id="{6D0C7B07-A814-1641-8AF5-F439CD6A131D}" type="datetimeFigureOut">
               <a:rPr lang="en-US" smtClean="0"/>
-              <a:t>4/1/23</a:t>
+              <a:t>1/23/26</a:t>
             </a:fld>
             <a:endParaRPr lang="en-US"/>
           </a:p>
@@ -1826,7 +1828,7 @@
           <a:p>
             <a:fld id="{6D0C7B07-A814-1641-8AF5-F439CD6A131D}" type="datetimeFigureOut">
               <a:rPr lang="en-US" smtClean="0"/>
-              <a:t>4/1/23</a:t>
+              <a:t>1/23/26</a:t>
             </a:fld>
             <a:endParaRPr lang="en-US"/>
           </a:p>
@@ -1967,7 +1969,7 @@
           <a:p>
             <a:fld id="{6D0C7B07-A814-1641-8AF5-F439CD6A131D}" type="datetimeFigureOut">
               <a:rPr lang="en-US" smtClean="0"/>
-              <a:t>4/1/23</a:t>
+              <a:t>1/23/26</a:t>
             </a:fld>
             <a:endParaRPr lang="en-US"/>
           </a:p>
@@ -2080,7 +2082,7 @@
           <a:p>
             <a:fld id="{6D0C7B07-A814-1641-8AF5-F439CD6A131D}" type="datetimeFigureOut">
               <a:rPr lang="en-US" smtClean="0"/>
-              <a:t>4/1/23</a:t>
+              <a:t>1/23/26</a:t>
             </a:fld>
             <a:endParaRPr lang="en-US"/>
           </a:p>
@@ -2391,7 +2393,7 @@
           <a:p>
             <a:fld id="{6D0C7B07-A814-1641-8AF5-F439CD6A131D}" type="datetimeFigureOut">
               <a:rPr lang="en-US" smtClean="0"/>
-              <a:t>4/1/23</a:t>
+              <a:t>1/23/26</a:t>
             </a:fld>
             <a:endParaRPr lang="en-US"/>
           </a:p>
@@ -2679,7 +2681,7 @@
           <a:p>
             <a:fld id="{6D0C7B07-A814-1641-8AF5-F439CD6A131D}" type="datetimeFigureOut">
               <a:rPr lang="en-US" smtClean="0"/>
-              <a:t>4/1/23</a:t>
+              <a:t>1/23/26</a:t>
             </a:fld>
             <a:endParaRPr lang="en-US"/>
           </a:p>
@@ -2920,7 +2922,7 @@
           <a:p>
             <a:fld id="{6D0C7B07-A814-1641-8AF5-F439CD6A131D}" type="datetimeFigureOut">
               <a:rPr lang="en-US" smtClean="0"/>
-              <a:t>4/1/23</a:t>
+              <a:t>1/23/26</a:t>
             </a:fld>
             <a:endParaRPr lang="en-US"/>
           </a:p>
@@ -3337,357 +3339,1530 @@
           <a:chExt cx="0" cy="0"/>
         </a:xfrm>
       </p:grpSpPr>
-      <p:grpSp>
-        <p:nvGrpSpPr>
-          <p:cNvPr id="17" name="Group 16">
-            <a:extLst>
-              <a:ext uri="{FF2B5EF4-FFF2-40B4-BE49-F238E27FC236}">
-                <a16:creationId xmlns:a16="http://schemas.microsoft.com/office/drawing/2014/main" id="{7E8DDDD5-4480-44C1-0435-3573737404CF}"/>
-              </a:ext>
-            </a:extLst>
-          </p:cNvPr>
-          <p:cNvGrpSpPr/>
+      <p:pic>
+        <p:nvPicPr>
+          <p:cNvPr id="6" name="Picture 5">
+            <a:extLst>
+              <a:ext uri="{FF2B5EF4-FFF2-40B4-BE49-F238E27FC236}">
+                <a16:creationId xmlns:a16="http://schemas.microsoft.com/office/drawing/2014/main" id="{73F56729-8A33-21F8-9823-4EF069126943}"/>
+              </a:ext>
+            </a:extLst>
+          </p:cNvPr>
+          <p:cNvPicPr>
+            <a:picLocks noChangeAspect="1"/>
+          </p:cNvPicPr>
           <p:nvPr/>
-        </p:nvGrpSpPr>
-        <p:grpSpPr>
+        </p:nvPicPr>
+        <p:blipFill>
+          <a:blip r:embed="rId2"/>
+          <a:stretch>
+            <a:fillRect/>
+          </a:stretch>
+        </p:blipFill>
+        <p:spPr>
           <a:xfrm>
-            <a:off x="-1" y="0"/>
+            <a:off x="0" y="0"/>
             <a:ext cx="12192000" cy="6858000"/>
-            <a:chOff x="-1" y="0"/>
-            <a:chExt cx="12192000" cy="6858000"/>
           </a:xfrm>
-        </p:grpSpPr>
-        <p:pic>
-          <p:nvPicPr>
-            <p:cNvPr id="6" name="Picture 5">
-              <a:extLst>
-                <a:ext uri="{FF2B5EF4-FFF2-40B4-BE49-F238E27FC236}">
-                  <a16:creationId xmlns:a16="http://schemas.microsoft.com/office/drawing/2014/main" id="{73F56729-8A33-21F8-9823-4EF069126943}"/>
-                </a:ext>
-              </a:extLst>
-            </p:cNvPr>
-            <p:cNvPicPr>
-              <a:picLocks noChangeAspect="1"/>
-            </p:cNvPicPr>
-            <p:nvPr/>
-          </p:nvPicPr>
-          <p:blipFill>
-            <a:blip r:embed="rId2"/>
-            <a:stretch>
-              <a:fillRect/>
-            </a:stretch>
-          </p:blipFill>
-          <p:spPr>
-            <a:xfrm>
-              <a:off x="-1" y="0"/>
-              <a:ext cx="12192000" cy="6858000"/>
-            </a:xfrm>
-            <a:prstGeom prst="rect">
-              <a:avLst/>
-            </a:prstGeom>
-          </p:spPr>
-        </p:pic>
-        <p:sp>
-          <p:nvSpPr>
-            <p:cNvPr id="7" name="Rectangle 6">
-              <a:extLst>
-                <a:ext uri="{FF2B5EF4-FFF2-40B4-BE49-F238E27FC236}">
-                  <a16:creationId xmlns:a16="http://schemas.microsoft.com/office/drawing/2014/main" id="{CFE53B17-912D-4322-5EEB-28F03B4F669B}"/>
-                </a:ext>
-              </a:extLst>
-            </p:cNvPr>
-            <p:cNvSpPr/>
-            <p:nvPr/>
-          </p:nvSpPr>
-          <p:spPr>
-            <a:xfrm>
-              <a:off x="1944414" y="3429000"/>
-              <a:ext cx="3867807" cy="1132490"/>
-            </a:xfrm>
-            <a:prstGeom prst="rect">
-              <a:avLst/>
-            </a:prstGeom>
-            <a:solidFill>
-              <a:schemeClr val="bg1"/>
-            </a:solidFill>
-            <a:ln>
-              <a:noFill/>
-            </a:ln>
-          </p:spPr>
-          <p:style>
-            <a:lnRef idx="2">
-              <a:schemeClr val="accent1">
-                <a:shade val="50000"/>
-              </a:schemeClr>
-            </a:lnRef>
-            <a:fillRef idx="1">
-              <a:schemeClr val="accent1"/>
-            </a:fillRef>
-            <a:effectRef idx="0">
-              <a:schemeClr val="accent1"/>
-            </a:effectRef>
-            <a:fontRef idx="minor">
-              <a:schemeClr val="lt1"/>
-            </a:fontRef>
-          </p:style>
-          <p:txBody>
-            <a:bodyPr rtlCol="0" anchor="ctr"/>
-            <a:lstStyle/>
-            <a:p>
-              <a:pPr algn="ctr"/>
-              <a:endParaRPr lang="en-US"/>
-            </a:p>
-          </p:txBody>
-        </p:sp>
-        <p:sp>
-          <p:nvSpPr>
-            <p:cNvPr id="8" name="Rectangle 7">
-              <a:extLst>
-                <a:ext uri="{FF2B5EF4-FFF2-40B4-BE49-F238E27FC236}">
-                  <a16:creationId xmlns:a16="http://schemas.microsoft.com/office/drawing/2014/main" id="{8A601828-D9A1-2184-15D9-E8E501E69214}"/>
-                </a:ext>
-              </a:extLst>
-            </p:cNvPr>
-            <p:cNvSpPr/>
-            <p:nvPr/>
-          </p:nvSpPr>
-          <p:spPr>
-            <a:xfrm>
-              <a:off x="6784428" y="5433848"/>
-              <a:ext cx="2086303" cy="1350579"/>
-            </a:xfrm>
-            <a:prstGeom prst="rect">
-              <a:avLst/>
-            </a:prstGeom>
-            <a:solidFill>
-              <a:schemeClr val="bg1"/>
-            </a:solidFill>
-            <a:ln>
-              <a:noFill/>
-            </a:ln>
-          </p:spPr>
-          <p:style>
-            <a:lnRef idx="2">
-              <a:schemeClr val="accent1">
-                <a:shade val="50000"/>
-              </a:schemeClr>
-            </a:lnRef>
-            <a:fillRef idx="1">
-              <a:schemeClr val="accent1"/>
-            </a:fillRef>
-            <a:effectRef idx="0">
-              <a:schemeClr val="accent1"/>
-            </a:effectRef>
-            <a:fontRef idx="minor">
-              <a:schemeClr val="lt1"/>
-            </a:fontRef>
-          </p:style>
-          <p:txBody>
-            <a:bodyPr rtlCol="0" anchor="ctr"/>
-            <a:lstStyle/>
-            <a:p>
-              <a:pPr algn="ctr"/>
-              <a:endParaRPr lang="en-US"/>
-            </a:p>
-          </p:txBody>
-        </p:sp>
-        <p:pic>
-          <p:nvPicPr>
-            <p:cNvPr id="10" name="Picture 9">
-              <a:extLst>
-                <a:ext uri="{FF2B5EF4-FFF2-40B4-BE49-F238E27FC236}">
-                  <a16:creationId xmlns:a16="http://schemas.microsoft.com/office/drawing/2014/main" id="{4370F65C-C84B-2E8A-9822-F76642A7001B}"/>
-                </a:ext>
-              </a:extLst>
-            </p:cNvPr>
-            <p:cNvPicPr>
-              <a:picLocks noChangeAspect="1"/>
-            </p:cNvPicPr>
-            <p:nvPr/>
-          </p:nvPicPr>
-          <p:blipFill>
-            <a:blip r:embed="rId3"/>
-            <a:stretch>
-              <a:fillRect/>
-            </a:stretch>
-          </p:blipFill>
-          <p:spPr>
-            <a:xfrm>
-              <a:off x="7104665" y="5335935"/>
-              <a:ext cx="1448492" cy="1448492"/>
-            </a:xfrm>
-            <a:prstGeom prst="rect">
-              <a:avLst/>
-            </a:prstGeom>
-          </p:spPr>
-        </p:pic>
-        <p:sp>
-          <p:nvSpPr>
-            <p:cNvPr id="13" name="Rectangle 12">
-              <a:extLst>
-                <a:ext uri="{FF2B5EF4-FFF2-40B4-BE49-F238E27FC236}">
-                  <a16:creationId xmlns:a16="http://schemas.microsoft.com/office/drawing/2014/main" id="{438A8B2F-6EE0-7438-7BBE-FFA16FC0E36A}"/>
-                </a:ext>
-              </a:extLst>
-            </p:cNvPr>
-            <p:cNvSpPr/>
-            <p:nvPr/>
-          </p:nvSpPr>
-          <p:spPr>
-            <a:xfrm>
-              <a:off x="1944414" y="3581400"/>
-              <a:ext cx="3387241" cy="2003474"/>
-            </a:xfrm>
-            <a:prstGeom prst="rect">
-              <a:avLst/>
-            </a:prstGeom>
-            <a:solidFill>
-              <a:schemeClr val="bg1"/>
-            </a:solidFill>
-            <a:ln>
-              <a:noFill/>
-            </a:ln>
-          </p:spPr>
-          <p:style>
-            <a:lnRef idx="2">
-              <a:schemeClr val="accent1">
-                <a:shade val="50000"/>
-              </a:schemeClr>
-            </a:lnRef>
-            <a:fillRef idx="1">
-              <a:schemeClr val="accent1"/>
-            </a:fillRef>
-            <a:effectRef idx="0">
-              <a:schemeClr val="accent1"/>
-            </a:effectRef>
-            <a:fontRef idx="minor">
-              <a:schemeClr val="lt1"/>
-            </a:fontRef>
-          </p:style>
-          <p:txBody>
-            <a:bodyPr rtlCol="0" anchor="ctr"/>
-            <a:lstStyle/>
-            <a:p>
-              <a:pPr algn="ctr"/>
-              <a:endParaRPr lang="en-US"/>
-            </a:p>
-          </p:txBody>
-        </p:sp>
-        <p:pic>
-          <p:nvPicPr>
-            <p:cNvPr id="12" name="Picture 11">
-              <a:extLst>
-                <a:ext uri="{FF2B5EF4-FFF2-40B4-BE49-F238E27FC236}">
-                  <a16:creationId xmlns:a16="http://schemas.microsoft.com/office/drawing/2014/main" id="{D1F7EBDE-E182-A3B8-F2AE-A9A04558EC61}"/>
-                </a:ext>
-              </a:extLst>
-            </p:cNvPr>
-            <p:cNvPicPr>
-              <a:picLocks noChangeAspect="1"/>
-            </p:cNvPicPr>
-            <p:nvPr/>
-          </p:nvPicPr>
-          <p:blipFill rotWithShape="1">
-            <a:blip r:embed="rId2"/>
-            <a:srcRect l="16562" t="67861" r="56485" b="19617"/>
-            <a:stretch/>
-          </p:blipFill>
-          <p:spPr>
-            <a:xfrm>
-              <a:off x="2087735" y="4263093"/>
-              <a:ext cx="3286124" cy="858762"/>
-            </a:xfrm>
-            <a:prstGeom prst="rect">
-              <a:avLst/>
-            </a:prstGeom>
-          </p:spPr>
-        </p:pic>
-        <p:sp>
-          <p:nvSpPr>
-            <p:cNvPr id="16" name="Rectangle 15">
-              <a:extLst>
-                <a:ext uri="{FF2B5EF4-FFF2-40B4-BE49-F238E27FC236}">
-                  <a16:creationId xmlns:a16="http://schemas.microsoft.com/office/drawing/2014/main" id="{340326A8-01C0-CB87-01B1-31E82CD110FE}"/>
-                </a:ext>
-              </a:extLst>
-            </p:cNvPr>
-            <p:cNvSpPr/>
-            <p:nvPr/>
-          </p:nvSpPr>
-          <p:spPr>
-            <a:xfrm>
-              <a:off x="3394036" y="2844310"/>
-              <a:ext cx="2985745" cy="584690"/>
-            </a:xfrm>
-            <a:prstGeom prst="rect">
-              <a:avLst/>
-            </a:prstGeom>
-            <a:solidFill>
-              <a:schemeClr val="bg1"/>
-            </a:solidFill>
-            <a:ln>
-              <a:noFill/>
-            </a:ln>
-          </p:spPr>
-          <p:style>
-            <a:lnRef idx="2">
-              <a:schemeClr val="accent1">
-                <a:shade val="50000"/>
-              </a:schemeClr>
-            </a:lnRef>
-            <a:fillRef idx="1">
-              <a:schemeClr val="accent1"/>
-            </a:fillRef>
-            <a:effectRef idx="0">
-              <a:schemeClr val="accent1"/>
-            </a:effectRef>
-            <a:fontRef idx="minor">
-              <a:schemeClr val="lt1"/>
-            </a:fontRef>
-          </p:style>
-          <p:txBody>
-            <a:bodyPr rtlCol="0" anchor="ctr"/>
-            <a:lstStyle/>
-            <a:p>
-              <a:pPr algn="ctr"/>
-              <a:endParaRPr lang="en-US"/>
-            </a:p>
-          </p:txBody>
-        </p:sp>
-        <p:pic>
-          <p:nvPicPr>
-            <p:cNvPr id="15" name="Picture 14">
-              <a:extLst>
-                <a:ext uri="{FF2B5EF4-FFF2-40B4-BE49-F238E27FC236}">
-                  <a16:creationId xmlns:a16="http://schemas.microsoft.com/office/drawing/2014/main" id="{64017148-85DA-C535-E6E9-BDB35C67CB09}"/>
-                </a:ext>
-              </a:extLst>
-            </p:cNvPr>
-            <p:cNvPicPr>
-              <a:picLocks noChangeAspect="1"/>
-            </p:cNvPicPr>
-            <p:nvPr/>
-          </p:nvPicPr>
-          <p:blipFill rotWithShape="1">
-            <a:blip r:embed="rId2"/>
-            <a:srcRect l="27062" t="41194" r="47832" b="48524"/>
-            <a:stretch/>
-          </p:blipFill>
-          <p:spPr>
-            <a:xfrm>
-              <a:off x="3058643" y="3168045"/>
-              <a:ext cx="3061042" cy="705147"/>
-            </a:xfrm>
-            <a:prstGeom prst="rect">
-              <a:avLst/>
-            </a:prstGeom>
-          </p:spPr>
-        </p:pic>
-      </p:grpSp>
+          <a:prstGeom prst="rect">
+            <a:avLst/>
+          </a:prstGeom>
+        </p:spPr>
+      </p:pic>
+      <p:sp>
+        <p:nvSpPr>
+          <p:cNvPr id="7" name="Rectangle 6">
+            <a:extLst>
+              <a:ext uri="{FF2B5EF4-FFF2-40B4-BE49-F238E27FC236}">
+                <a16:creationId xmlns:a16="http://schemas.microsoft.com/office/drawing/2014/main" id="{CFE53B17-912D-4322-5EEB-28F03B4F669B}"/>
+              </a:ext>
+            </a:extLst>
+          </p:cNvPr>
+          <p:cNvSpPr/>
+          <p:nvPr/>
+        </p:nvSpPr>
+        <p:spPr>
+          <a:xfrm>
+            <a:off x="1944414" y="3429000"/>
+            <a:ext cx="3867807" cy="1132490"/>
+          </a:xfrm>
+          <a:prstGeom prst="rect">
+            <a:avLst/>
+          </a:prstGeom>
+          <a:solidFill>
+            <a:schemeClr val="bg1"/>
+          </a:solidFill>
+          <a:ln>
+            <a:noFill/>
+          </a:ln>
+        </p:spPr>
+        <p:style>
+          <a:lnRef idx="2">
+            <a:schemeClr val="accent1">
+              <a:shade val="50000"/>
+            </a:schemeClr>
+          </a:lnRef>
+          <a:fillRef idx="1">
+            <a:schemeClr val="accent1"/>
+          </a:fillRef>
+          <a:effectRef idx="0">
+            <a:schemeClr val="accent1"/>
+          </a:effectRef>
+          <a:fontRef idx="minor">
+            <a:schemeClr val="lt1"/>
+          </a:fontRef>
+        </p:style>
+        <p:txBody>
+          <a:bodyPr rtlCol="0" anchor="ctr"/>
+          <a:lstStyle/>
+          <a:p>
+            <a:pPr algn="ctr"/>
+            <a:endParaRPr lang="en-US"/>
+          </a:p>
+        </p:txBody>
+      </p:sp>
+      <p:sp>
+        <p:nvSpPr>
+          <p:cNvPr id="8" name="Rectangle 7">
+            <a:extLst>
+              <a:ext uri="{FF2B5EF4-FFF2-40B4-BE49-F238E27FC236}">
+                <a16:creationId xmlns:a16="http://schemas.microsoft.com/office/drawing/2014/main" id="{8A601828-D9A1-2184-15D9-E8E501E69214}"/>
+              </a:ext>
+            </a:extLst>
+          </p:cNvPr>
+          <p:cNvSpPr/>
+          <p:nvPr/>
+        </p:nvSpPr>
+        <p:spPr>
+          <a:xfrm>
+            <a:off x="6784428" y="5433848"/>
+            <a:ext cx="2086303" cy="1350579"/>
+          </a:xfrm>
+          <a:prstGeom prst="rect">
+            <a:avLst/>
+          </a:prstGeom>
+          <a:solidFill>
+            <a:schemeClr val="bg1"/>
+          </a:solidFill>
+          <a:ln>
+            <a:noFill/>
+          </a:ln>
+        </p:spPr>
+        <p:style>
+          <a:lnRef idx="2">
+            <a:schemeClr val="accent1">
+              <a:shade val="50000"/>
+            </a:schemeClr>
+          </a:lnRef>
+          <a:fillRef idx="1">
+            <a:schemeClr val="accent1"/>
+          </a:fillRef>
+          <a:effectRef idx="0">
+            <a:schemeClr val="accent1"/>
+          </a:effectRef>
+          <a:fontRef idx="minor">
+            <a:schemeClr val="lt1"/>
+          </a:fontRef>
+        </p:style>
+        <p:txBody>
+          <a:bodyPr rtlCol="0" anchor="ctr"/>
+          <a:lstStyle/>
+          <a:p>
+            <a:pPr algn="ctr"/>
+            <a:endParaRPr lang="en-US"/>
+          </a:p>
+        </p:txBody>
+      </p:sp>
+      <p:pic>
+        <p:nvPicPr>
+          <p:cNvPr id="10" name="Picture 9">
+            <a:extLst>
+              <a:ext uri="{FF2B5EF4-FFF2-40B4-BE49-F238E27FC236}">
+                <a16:creationId xmlns:a16="http://schemas.microsoft.com/office/drawing/2014/main" id="{4370F65C-C84B-2E8A-9822-F76642A7001B}"/>
+              </a:ext>
+            </a:extLst>
+          </p:cNvPr>
+          <p:cNvPicPr>
+            <a:picLocks noChangeAspect="1"/>
+          </p:cNvPicPr>
+          <p:nvPr/>
+        </p:nvPicPr>
+        <p:blipFill>
+          <a:blip r:embed="rId3"/>
+          <a:stretch>
+            <a:fillRect/>
+          </a:stretch>
+        </p:blipFill>
+        <p:spPr>
+          <a:xfrm>
+            <a:off x="7104665" y="5335935"/>
+            <a:ext cx="1448492" cy="1448492"/>
+          </a:xfrm>
+          <a:prstGeom prst="rect">
+            <a:avLst/>
+          </a:prstGeom>
+        </p:spPr>
+      </p:pic>
+      <p:sp>
+        <p:nvSpPr>
+          <p:cNvPr id="13" name="Rectangle 12">
+            <a:extLst>
+              <a:ext uri="{FF2B5EF4-FFF2-40B4-BE49-F238E27FC236}">
+                <a16:creationId xmlns:a16="http://schemas.microsoft.com/office/drawing/2014/main" id="{438A8B2F-6EE0-7438-7BBE-FFA16FC0E36A}"/>
+              </a:ext>
+            </a:extLst>
+          </p:cNvPr>
+          <p:cNvSpPr/>
+          <p:nvPr/>
+        </p:nvSpPr>
+        <p:spPr>
+          <a:xfrm>
+            <a:off x="1944414" y="3581400"/>
+            <a:ext cx="3387241" cy="2003474"/>
+          </a:xfrm>
+          <a:prstGeom prst="rect">
+            <a:avLst/>
+          </a:prstGeom>
+          <a:solidFill>
+            <a:schemeClr val="bg1"/>
+          </a:solidFill>
+          <a:ln>
+            <a:noFill/>
+          </a:ln>
+        </p:spPr>
+        <p:style>
+          <a:lnRef idx="2">
+            <a:schemeClr val="accent1">
+              <a:shade val="50000"/>
+            </a:schemeClr>
+          </a:lnRef>
+          <a:fillRef idx="1">
+            <a:schemeClr val="accent1"/>
+          </a:fillRef>
+          <a:effectRef idx="0">
+            <a:schemeClr val="accent1"/>
+          </a:effectRef>
+          <a:fontRef idx="minor">
+            <a:schemeClr val="lt1"/>
+          </a:fontRef>
+        </p:style>
+        <p:txBody>
+          <a:bodyPr rtlCol="0" anchor="ctr"/>
+          <a:lstStyle/>
+          <a:p>
+            <a:pPr algn="ctr"/>
+            <a:endParaRPr lang="en-US"/>
+          </a:p>
+        </p:txBody>
+      </p:sp>
+      <p:pic>
+        <p:nvPicPr>
+          <p:cNvPr id="12" name="Picture 11">
+            <a:extLst>
+              <a:ext uri="{FF2B5EF4-FFF2-40B4-BE49-F238E27FC236}">
+                <a16:creationId xmlns:a16="http://schemas.microsoft.com/office/drawing/2014/main" id="{D1F7EBDE-E182-A3B8-F2AE-A9A04558EC61}"/>
+              </a:ext>
+            </a:extLst>
+          </p:cNvPr>
+          <p:cNvPicPr>
+            <a:picLocks noChangeAspect="1"/>
+          </p:cNvPicPr>
+          <p:nvPr/>
+        </p:nvPicPr>
+        <p:blipFill rotWithShape="1">
+          <a:blip r:embed="rId2"/>
+          <a:srcRect l="16562" t="67861" r="56485" b="19617"/>
+          <a:stretch/>
+        </p:blipFill>
+        <p:spPr>
+          <a:xfrm>
+            <a:off x="2087735" y="4263093"/>
+            <a:ext cx="3286124" cy="858762"/>
+          </a:xfrm>
+          <a:prstGeom prst="rect">
+            <a:avLst/>
+          </a:prstGeom>
+        </p:spPr>
+      </p:pic>
+      <p:sp>
+        <p:nvSpPr>
+          <p:cNvPr id="16" name="Rectangle 15">
+            <a:extLst>
+              <a:ext uri="{FF2B5EF4-FFF2-40B4-BE49-F238E27FC236}">
+                <a16:creationId xmlns:a16="http://schemas.microsoft.com/office/drawing/2014/main" id="{340326A8-01C0-CB87-01B1-31E82CD110FE}"/>
+              </a:ext>
+            </a:extLst>
+          </p:cNvPr>
+          <p:cNvSpPr/>
+          <p:nvPr/>
+        </p:nvSpPr>
+        <p:spPr>
+          <a:xfrm>
+            <a:off x="3394036" y="2844310"/>
+            <a:ext cx="2985745" cy="584690"/>
+          </a:xfrm>
+          <a:prstGeom prst="rect">
+            <a:avLst/>
+          </a:prstGeom>
+          <a:solidFill>
+            <a:schemeClr val="bg1"/>
+          </a:solidFill>
+          <a:ln>
+            <a:noFill/>
+          </a:ln>
+        </p:spPr>
+        <p:style>
+          <a:lnRef idx="2">
+            <a:schemeClr val="accent1">
+              <a:shade val="50000"/>
+            </a:schemeClr>
+          </a:lnRef>
+          <a:fillRef idx="1">
+            <a:schemeClr val="accent1"/>
+          </a:fillRef>
+          <a:effectRef idx="0">
+            <a:schemeClr val="accent1"/>
+          </a:effectRef>
+          <a:fontRef idx="minor">
+            <a:schemeClr val="lt1"/>
+          </a:fontRef>
+        </p:style>
+        <p:txBody>
+          <a:bodyPr rtlCol="0" anchor="ctr"/>
+          <a:lstStyle/>
+          <a:p>
+            <a:pPr algn="ctr"/>
+            <a:endParaRPr lang="en-US"/>
+          </a:p>
+        </p:txBody>
+      </p:sp>
+      <p:pic>
+        <p:nvPicPr>
+          <p:cNvPr id="15" name="Picture 14">
+            <a:extLst>
+              <a:ext uri="{FF2B5EF4-FFF2-40B4-BE49-F238E27FC236}">
+                <a16:creationId xmlns:a16="http://schemas.microsoft.com/office/drawing/2014/main" id="{64017148-85DA-C535-E6E9-BDB35C67CB09}"/>
+              </a:ext>
+            </a:extLst>
+          </p:cNvPr>
+          <p:cNvPicPr>
+            <a:picLocks noChangeAspect="1"/>
+          </p:cNvPicPr>
+          <p:nvPr/>
+        </p:nvPicPr>
+        <p:blipFill rotWithShape="1">
+          <a:blip r:embed="rId2"/>
+          <a:srcRect l="27062" t="41194" r="47832" b="48524"/>
+          <a:stretch/>
+        </p:blipFill>
+        <p:spPr>
+          <a:xfrm>
+            <a:off x="3058643" y="3168045"/>
+            <a:ext cx="3061042" cy="705147"/>
+          </a:xfrm>
+          <a:prstGeom prst="rect">
+            <a:avLst/>
+          </a:prstGeom>
+        </p:spPr>
+      </p:pic>
     </p:spTree>
     <p:extLst>
       <p:ext uri="{BB962C8B-B14F-4D97-AF65-F5344CB8AC3E}">
         <p14:creationId xmlns:p14="http://schemas.microsoft.com/office/powerpoint/2010/main" val="3644839903"/>
+      </p:ext>
+    </p:extLst>
+  </p:cSld>
+  <p:clrMapOvr>
+    <a:masterClrMapping/>
+  </p:clrMapOvr>
+</p:sld>
+</file>
+
+<file path=ppt/slides/slide2.xml><?xml version="1.0" encoding="utf-8"?>
+<p:sld xmlns:a="http://schemas.openxmlformats.org/drawingml/2006/main" xmlns:r="http://schemas.openxmlformats.org/officeDocument/2006/relationships" xmlns:p="http://schemas.openxmlformats.org/presentationml/2006/main">
+  <p:cSld>
+    <p:spTree>
+      <p:nvGrpSpPr>
+        <p:cNvPr id="1" name=""/>
+        <p:cNvGrpSpPr/>
+        <p:nvPr/>
+      </p:nvGrpSpPr>
+      <p:grpSpPr>
+        <a:xfrm>
+          <a:off x="0" y="0"/>
+          <a:ext cx="0" cy="0"/>
+          <a:chOff x="0" y="0"/>
+          <a:chExt cx="0" cy="0"/>
+        </a:xfrm>
+      </p:grpSpPr>
+      <p:sp>
+        <p:nvSpPr>
+          <p:cNvPr id="2" name="Title 1">
+            <a:extLst>
+              <a:ext uri="{FF2B5EF4-FFF2-40B4-BE49-F238E27FC236}">
+                <a16:creationId xmlns:a16="http://schemas.microsoft.com/office/drawing/2014/main" id="{A4DDF5BD-C13D-2605-0F14-423056130C02}"/>
+              </a:ext>
+            </a:extLst>
+          </p:cNvPr>
+          <p:cNvSpPr>
+            <a:spLocks noGrp="1"/>
+          </p:cNvSpPr>
+          <p:nvPr>
+            <p:ph type="title"/>
+          </p:nvPr>
+        </p:nvSpPr>
+        <p:spPr/>
+        <p:txBody>
+          <a:bodyPr/>
+          <a:lstStyle/>
+          <a:p>
+            <a:r>
+              <a:rPr lang="en-US" dirty="0"/>
+              <a:t>Updated Jan 2026</a:t>
+            </a:r>
+          </a:p>
+        </p:txBody>
+      </p:sp>
+      <p:sp>
+        <p:nvSpPr>
+          <p:cNvPr id="9" name="Content Placeholder 8">
+            <a:extLst>
+              <a:ext uri="{FF2B5EF4-FFF2-40B4-BE49-F238E27FC236}">
+                <a16:creationId xmlns:a16="http://schemas.microsoft.com/office/drawing/2014/main" id="{47188934-8E17-5C7F-3609-CD30E6CB4EA5}"/>
+              </a:ext>
+            </a:extLst>
+          </p:cNvPr>
+          <p:cNvSpPr>
+            <a:spLocks noGrp="1"/>
+          </p:cNvSpPr>
+          <p:nvPr>
+            <p:ph idx="1"/>
+          </p:nvPr>
+        </p:nvSpPr>
+        <p:spPr>
+          <a:xfrm>
+            <a:off x="838200" y="1825625"/>
+            <a:ext cx="3341914" cy="4351338"/>
+          </a:xfrm>
+        </p:spPr>
+        <p:txBody>
+          <a:bodyPr>
+            <a:normAutofit fontScale="55000" lnSpcReduction="20000"/>
+          </a:bodyPr>
+          <a:lstStyle/>
+          <a:p>
+            <a:r>
+              <a:rPr lang="en-US" dirty="0"/>
+              <a:t>Alberta</a:t>
+            </a:r>
+          </a:p>
+          <a:p>
+            <a:r>
+              <a:rPr lang="en-US" dirty="0"/>
+              <a:t>Berkeley National Lab</a:t>
+            </a:r>
+          </a:p>
+          <a:p>
+            <a:r>
+              <a:rPr lang="en-US" dirty="0"/>
+              <a:t>UC Berkeley</a:t>
+            </a:r>
+          </a:p>
+          <a:p>
+            <a:r>
+              <a:rPr lang="en-US" dirty="0"/>
+              <a:t>Kings</a:t>
+            </a:r>
+          </a:p>
+          <a:p>
+            <a:r>
+              <a:rPr lang="en-US" dirty="0" err="1"/>
+              <a:t>Triumf</a:t>
+            </a:r>
+            <a:endParaRPr lang="en-US" dirty="0"/>
+          </a:p>
+          <a:p>
+            <a:r>
+              <a:rPr lang="en-US" dirty="0"/>
+              <a:t>Queens</a:t>
+            </a:r>
+          </a:p>
+          <a:p>
+            <a:r>
+              <a:rPr lang="en-US" dirty="0"/>
+              <a:t>Sussex</a:t>
+            </a:r>
+          </a:p>
+          <a:p>
+            <a:r>
+              <a:rPr lang="en-US" dirty="0"/>
+              <a:t>Oxford</a:t>
+            </a:r>
+          </a:p>
+          <a:p>
+            <a:r>
+              <a:rPr lang="en-US" dirty="0"/>
+              <a:t>Penn</a:t>
+            </a:r>
+          </a:p>
+          <a:p>
+            <a:r>
+              <a:rPr lang="en-US" dirty="0"/>
+              <a:t>Laurentian</a:t>
+            </a:r>
+          </a:p>
+          <a:p>
+            <a:r>
+              <a:rPr lang="en-US" dirty="0"/>
+              <a:t>SNOLAB</a:t>
+            </a:r>
+          </a:p>
+          <a:p>
+            <a:r>
+              <a:rPr lang="en-US" dirty="0"/>
+              <a:t>BNL</a:t>
+            </a:r>
+          </a:p>
+          <a:p>
+            <a:r>
+              <a:rPr lang="en-US" dirty="0"/>
+              <a:t>UNAM</a:t>
+            </a:r>
+          </a:p>
+          <a:p>
+            <a:r>
+              <a:rPr lang="en-US" dirty="0"/>
+              <a:t>Dresden</a:t>
+            </a:r>
+          </a:p>
+          <a:p>
+            <a:r>
+              <a:rPr lang="en-US" dirty="0"/>
+              <a:t>Shandong</a:t>
+            </a:r>
+          </a:p>
+        </p:txBody>
+      </p:sp>
+      <p:sp>
+        <p:nvSpPr>
+          <p:cNvPr id="10" name="Content Placeholder 8">
+            <a:extLst>
+              <a:ext uri="{FF2B5EF4-FFF2-40B4-BE49-F238E27FC236}">
+                <a16:creationId xmlns:a16="http://schemas.microsoft.com/office/drawing/2014/main" id="{1DD63A37-1E9F-3921-700C-3C32853A5BBD}"/>
+              </a:ext>
+            </a:extLst>
+          </p:cNvPr>
+          <p:cNvSpPr txBox="1">
+            <a:spLocks/>
+          </p:cNvSpPr>
+          <p:nvPr/>
+        </p:nvSpPr>
+        <p:spPr>
+          <a:xfrm>
+            <a:off x="7805057" y="1945368"/>
+            <a:ext cx="3341914" cy="4351338"/>
+          </a:xfrm>
+          <a:prstGeom prst="rect">
+            <a:avLst/>
+          </a:prstGeom>
+        </p:spPr>
+        <p:txBody>
+          <a:bodyPr vert="horz" lIns="91440" tIns="45720" rIns="91440" bIns="45720" rtlCol="0">
+            <a:normAutofit/>
+          </a:bodyPr>
+          <a:lstStyle>
+            <a:lvl1pPr marL="228600" indent="-228600" algn="l" defTabSz="914400" rtl="0" eaLnBrk="1" latinLnBrk="0" hangingPunct="1">
+              <a:lnSpc>
+                <a:spcPct val="90000"/>
+              </a:lnSpc>
+              <a:spcBef>
+                <a:spcPts val="1000"/>
+              </a:spcBef>
+              <a:buFont typeface="Arial" panose="020B0604020202020204" pitchFamily="34" charset="0"/>
+              <a:buChar char="•"/>
+              <a:defRPr sz="2800" kern="1200">
+                <a:solidFill>
+                  <a:schemeClr val="tx1"/>
+                </a:solidFill>
+                <a:latin typeface="+mn-lt"/>
+                <a:ea typeface="+mn-ea"/>
+                <a:cs typeface="+mn-cs"/>
+              </a:defRPr>
+            </a:lvl1pPr>
+            <a:lvl2pPr marL="685800" indent="-228600" algn="l" defTabSz="914400" rtl="0" eaLnBrk="1" latinLnBrk="0" hangingPunct="1">
+              <a:lnSpc>
+                <a:spcPct val="90000"/>
+              </a:lnSpc>
+              <a:spcBef>
+                <a:spcPts val="500"/>
+              </a:spcBef>
+              <a:buFont typeface="Arial" panose="020B0604020202020204" pitchFamily="34" charset="0"/>
+              <a:buChar char="•"/>
+              <a:defRPr sz="2400" kern="1200">
+                <a:solidFill>
+                  <a:schemeClr val="tx1"/>
+                </a:solidFill>
+                <a:latin typeface="+mn-lt"/>
+                <a:ea typeface="+mn-ea"/>
+                <a:cs typeface="+mn-cs"/>
+              </a:defRPr>
+            </a:lvl2pPr>
+            <a:lvl3pPr marL="1143000" indent="-228600" algn="l" defTabSz="914400" rtl="0" eaLnBrk="1" latinLnBrk="0" hangingPunct="1">
+              <a:lnSpc>
+                <a:spcPct val="90000"/>
+              </a:lnSpc>
+              <a:spcBef>
+                <a:spcPts val="500"/>
+              </a:spcBef>
+              <a:buFont typeface="Arial" panose="020B0604020202020204" pitchFamily="34" charset="0"/>
+              <a:buChar char="•"/>
+              <a:defRPr sz="2000" kern="1200">
+                <a:solidFill>
+                  <a:schemeClr val="tx1"/>
+                </a:solidFill>
+                <a:latin typeface="+mn-lt"/>
+                <a:ea typeface="+mn-ea"/>
+                <a:cs typeface="+mn-cs"/>
+              </a:defRPr>
+            </a:lvl3pPr>
+            <a:lvl4pPr marL="1600200" indent="-228600" algn="l" defTabSz="914400" rtl="0" eaLnBrk="1" latinLnBrk="0" hangingPunct="1">
+              <a:lnSpc>
+                <a:spcPct val="90000"/>
+              </a:lnSpc>
+              <a:spcBef>
+                <a:spcPts val="500"/>
+              </a:spcBef>
+              <a:buFont typeface="Arial" panose="020B0604020202020204" pitchFamily="34" charset="0"/>
+              <a:buChar char="•"/>
+              <a:defRPr sz="1800" kern="1200">
+                <a:solidFill>
+                  <a:schemeClr val="tx1"/>
+                </a:solidFill>
+                <a:latin typeface="+mn-lt"/>
+                <a:ea typeface="+mn-ea"/>
+                <a:cs typeface="+mn-cs"/>
+              </a:defRPr>
+            </a:lvl4pPr>
+            <a:lvl5pPr marL="2057400" indent="-228600" algn="l" defTabSz="914400" rtl="0" eaLnBrk="1" latinLnBrk="0" hangingPunct="1">
+              <a:lnSpc>
+                <a:spcPct val="90000"/>
+              </a:lnSpc>
+              <a:spcBef>
+                <a:spcPts val="500"/>
+              </a:spcBef>
+              <a:buFont typeface="Arial" panose="020B0604020202020204" pitchFamily="34" charset="0"/>
+              <a:buChar char="•"/>
+              <a:defRPr sz="1800" kern="1200">
+                <a:solidFill>
+                  <a:schemeClr val="tx1"/>
+                </a:solidFill>
+                <a:latin typeface="+mn-lt"/>
+                <a:ea typeface="+mn-ea"/>
+                <a:cs typeface="+mn-cs"/>
+              </a:defRPr>
+            </a:lvl5pPr>
+            <a:lvl6pPr marL="2514600" indent="-228600" algn="l" defTabSz="914400" rtl="0" eaLnBrk="1" latinLnBrk="0" hangingPunct="1">
+              <a:lnSpc>
+                <a:spcPct val="90000"/>
+              </a:lnSpc>
+              <a:spcBef>
+                <a:spcPts val="500"/>
+              </a:spcBef>
+              <a:buFont typeface="Arial" panose="020B0604020202020204" pitchFamily="34" charset="0"/>
+              <a:buChar char="•"/>
+              <a:defRPr sz="1800" kern="1200">
+                <a:solidFill>
+                  <a:schemeClr val="tx1"/>
+                </a:solidFill>
+                <a:latin typeface="+mn-lt"/>
+                <a:ea typeface="+mn-ea"/>
+                <a:cs typeface="+mn-cs"/>
+              </a:defRPr>
+            </a:lvl6pPr>
+            <a:lvl7pPr marL="2971800" indent="-228600" algn="l" defTabSz="914400" rtl="0" eaLnBrk="1" latinLnBrk="0" hangingPunct="1">
+              <a:lnSpc>
+                <a:spcPct val="90000"/>
+              </a:lnSpc>
+              <a:spcBef>
+                <a:spcPts val="500"/>
+              </a:spcBef>
+              <a:buFont typeface="Arial" panose="020B0604020202020204" pitchFamily="34" charset="0"/>
+              <a:buChar char="•"/>
+              <a:defRPr sz="1800" kern="1200">
+                <a:solidFill>
+                  <a:schemeClr val="tx1"/>
+                </a:solidFill>
+                <a:latin typeface="+mn-lt"/>
+                <a:ea typeface="+mn-ea"/>
+                <a:cs typeface="+mn-cs"/>
+              </a:defRPr>
+            </a:lvl7pPr>
+            <a:lvl8pPr marL="3429000" indent="-228600" algn="l" defTabSz="914400" rtl="0" eaLnBrk="1" latinLnBrk="0" hangingPunct="1">
+              <a:lnSpc>
+                <a:spcPct val="90000"/>
+              </a:lnSpc>
+              <a:spcBef>
+                <a:spcPts val="500"/>
+              </a:spcBef>
+              <a:buFont typeface="Arial" panose="020B0604020202020204" pitchFamily="34" charset="0"/>
+              <a:buChar char="•"/>
+              <a:defRPr sz="1800" kern="1200">
+                <a:solidFill>
+                  <a:schemeClr val="tx1"/>
+                </a:solidFill>
+                <a:latin typeface="+mn-lt"/>
+                <a:ea typeface="+mn-ea"/>
+                <a:cs typeface="+mn-cs"/>
+              </a:defRPr>
+            </a:lvl8pPr>
+            <a:lvl9pPr marL="3886200" indent="-228600" algn="l" defTabSz="914400" rtl="0" eaLnBrk="1" latinLnBrk="0" hangingPunct="1">
+              <a:lnSpc>
+                <a:spcPct val="90000"/>
+              </a:lnSpc>
+              <a:spcBef>
+                <a:spcPts val="500"/>
+              </a:spcBef>
+              <a:buFont typeface="Arial" panose="020B0604020202020204" pitchFamily="34" charset="0"/>
+              <a:buChar char="•"/>
+              <a:defRPr sz="1800" kern="1200">
+                <a:solidFill>
+                  <a:schemeClr val="tx1"/>
+                </a:solidFill>
+                <a:latin typeface="+mn-lt"/>
+                <a:ea typeface="+mn-ea"/>
+                <a:cs typeface="+mn-cs"/>
+              </a:defRPr>
+            </a:lvl9pPr>
+          </a:lstStyle>
+          <a:p>
+            <a:pPr marL="0" indent="0">
+              <a:buNone/>
+            </a:pPr>
+            <a:r>
+              <a:rPr lang="en-US" dirty="0"/>
+              <a:t>Removed:</a:t>
+            </a:r>
+          </a:p>
+          <a:p>
+            <a:r>
+              <a:rPr lang="en-US" dirty="0"/>
+              <a:t>Lancaster</a:t>
+            </a:r>
+          </a:p>
+          <a:p>
+            <a:r>
+              <a:rPr lang="en-US" dirty="0"/>
+              <a:t>Liverpool</a:t>
+            </a:r>
+          </a:p>
+          <a:p>
+            <a:r>
+              <a:rPr lang="en-US" dirty="0"/>
+              <a:t>Chicago</a:t>
+            </a:r>
+          </a:p>
+          <a:p>
+            <a:r>
+              <a:rPr lang="en-US" dirty="0"/>
+              <a:t>Boston</a:t>
+            </a:r>
+          </a:p>
+          <a:p>
+            <a:r>
+              <a:rPr lang="en-US" dirty="0"/>
+              <a:t>UC Davis</a:t>
+            </a:r>
+          </a:p>
+        </p:txBody>
+      </p:sp>
+    </p:spTree>
+    <p:extLst>
+      <p:ext uri="{BB962C8B-B14F-4D97-AF65-F5344CB8AC3E}">
+        <p14:creationId xmlns:p14="http://schemas.microsoft.com/office/powerpoint/2010/main" val="3964320052"/>
+      </p:ext>
+    </p:extLst>
+  </p:cSld>
+  <p:clrMapOvr>
+    <a:masterClrMapping/>
+  </p:clrMapOvr>
+</p:sld>
+</file>
+
+<file path=ppt/slides/slide3.xml><?xml version="1.0" encoding="utf-8"?>
+<p:sld xmlns:a="http://schemas.openxmlformats.org/drawingml/2006/main" xmlns:r="http://schemas.openxmlformats.org/officeDocument/2006/relationships" xmlns:p="http://schemas.openxmlformats.org/presentationml/2006/main">
+  <p:cSld>
+    <p:spTree>
+      <p:nvGrpSpPr>
+        <p:cNvPr id="1" name=""/>
+        <p:cNvGrpSpPr/>
+        <p:nvPr/>
+      </p:nvGrpSpPr>
+      <p:grpSpPr>
+        <a:xfrm>
+          <a:off x="0" y="0"/>
+          <a:ext cx="0" cy="0"/>
+          <a:chOff x="0" y="0"/>
+          <a:chExt cx="0" cy="0"/>
+        </a:xfrm>
+      </p:grpSpPr>
+      <p:pic>
+        <p:nvPicPr>
+          <p:cNvPr id="1044" name="Picture 20" descr="University of Sussex | Brands of the World™ | Download vector logos and  logotypes">
+            <a:extLst>
+              <a:ext uri="{FF2B5EF4-FFF2-40B4-BE49-F238E27FC236}">
+                <a16:creationId xmlns:a16="http://schemas.microsoft.com/office/drawing/2014/main" id="{81EA8CDF-A417-3DDD-5714-3499D52CC398}"/>
+              </a:ext>
+            </a:extLst>
+          </p:cNvPr>
+          <p:cNvPicPr>
+            <a:picLocks noChangeAspect="1" noChangeArrowheads="1"/>
+          </p:cNvPicPr>
+          <p:nvPr/>
+        </p:nvPicPr>
+        <p:blipFill rotWithShape="1">
+          <a:blip r:embed="rId2">
+            <a:extLst>
+              <a:ext uri="{28A0092B-C50C-407E-A947-70E740481C1C}">
+                <a14:useLocalDpi xmlns:a14="http://schemas.microsoft.com/office/drawing/2010/main" val="0"/>
+              </a:ext>
+            </a:extLst>
+          </a:blip>
+          <a:srcRect t="20418" b="17513"/>
+          <a:stretch>
+            <a:fillRect/>
+          </a:stretch>
+        </p:blipFill>
+        <p:spPr bwMode="auto">
+          <a:xfrm>
+            <a:off x="93592" y="5027602"/>
+            <a:ext cx="2929085" cy="1818057"/>
+          </a:xfrm>
+          <a:prstGeom prst="rect">
+            <a:avLst/>
+          </a:prstGeom>
+          <a:noFill/>
+          <a:extLst>
+            <a:ext uri="{909E8E84-426E-40DD-AFC4-6F175D3DCCD1}">
+              <a14:hiddenFill xmlns:a14="http://schemas.microsoft.com/office/drawing/2010/main">
+                <a:solidFill>
+                  <a:srgbClr val="FFFFFF"/>
+                </a:solidFill>
+              </a14:hiddenFill>
+            </a:ext>
+          </a:extLst>
+        </p:spPr>
+      </p:pic>
+      <p:pic>
+        <p:nvPicPr>
+          <p:cNvPr id="1052" name="Picture 28" descr="SNOLAB - Partner Institute - McDonald Institute">
+            <a:extLst>
+              <a:ext uri="{FF2B5EF4-FFF2-40B4-BE49-F238E27FC236}">
+                <a16:creationId xmlns:a16="http://schemas.microsoft.com/office/drawing/2014/main" id="{75E305C0-E9F5-5003-6C68-382B1D6ED8ED}"/>
+              </a:ext>
+            </a:extLst>
+          </p:cNvPr>
+          <p:cNvPicPr>
+            <a:picLocks noChangeAspect="1" noChangeArrowheads="1"/>
+          </p:cNvPicPr>
+          <p:nvPr/>
+        </p:nvPicPr>
+        <p:blipFill>
+          <a:blip r:embed="rId3">
+            <a:extLst>
+              <a:ext uri="{28A0092B-C50C-407E-A947-70E740481C1C}">
+                <a14:useLocalDpi xmlns:a14="http://schemas.microsoft.com/office/drawing/2010/main" val="0"/>
+              </a:ext>
+            </a:extLst>
+          </a:blip>
+          <a:srcRect/>
+          <a:stretch>
+            <a:fillRect/>
+          </a:stretch>
+        </p:blipFill>
+        <p:spPr bwMode="auto">
+          <a:xfrm>
+            <a:off x="8970700" y="1693796"/>
+            <a:ext cx="3096079" cy="1633207"/>
+          </a:xfrm>
+          <a:prstGeom prst="rect">
+            <a:avLst/>
+          </a:prstGeom>
+          <a:noFill/>
+          <a:extLst>
+            <a:ext uri="{909E8E84-426E-40DD-AFC4-6F175D3DCCD1}">
+              <a14:hiddenFill xmlns:a14="http://schemas.microsoft.com/office/drawing/2010/main">
+                <a:solidFill>
+                  <a:srgbClr val="FFFFFF"/>
+                </a:solidFill>
+              </a14:hiddenFill>
+            </a:ext>
+          </a:extLst>
+        </p:spPr>
+      </p:pic>
+      <p:pic>
+        <p:nvPicPr>
+          <p:cNvPr id="1060" name="Picture 36" descr="Shandong University turns 120: Celebrating a legacy of innovation | Science  | AAAS">
+            <a:extLst>
+              <a:ext uri="{FF2B5EF4-FFF2-40B4-BE49-F238E27FC236}">
+                <a16:creationId xmlns:a16="http://schemas.microsoft.com/office/drawing/2014/main" id="{4FF21B47-910C-71ED-3153-5631DE827FF6}"/>
+              </a:ext>
+            </a:extLst>
+          </p:cNvPr>
+          <p:cNvPicPr>
+            <a:picLocks noChangeAspect="1" noChangeArrowheads="1"/>
+          </p:cNvPicPr>
+          <p:nvPr/>
+        </p:nvPicPr>
+        <p:blipFill>
+          <a:blip r:embed="rId4">
+            <a:extLst>
+              <a:ext uri="{28A0092B-C50C-407E-A947-70E740481C1C}">
+                <a14:useLocalDpi xmlns:a14="http://schemas.microsoft.com/office/drawing/2010/main" val="0"/>
+              </a:ext>
+            </a:extLst>
+          </a:blip>
+          <a:srcRect/>
+          <a:stretch>
+            <a:fillRect/>
+          </a:stretch>
+        </p:blipFill>
+        <p:spPr bwMode="auto">
+          <a:xfrm>
+            <a:off x="70453" y="2570839"/>
+            <a:ext cx="3545015" cy="1538599"/>
+          </a:xfrm>
+          <a:prstGeom prst="rect">
+            <a:avLst/>
+          </a:prstGeom>
+          <a:noFill/>
+          <a:extLst>
+            <a:ext uri="{909E8E84-426E-40DD-AFC4-6F175D3DCCD1}">
+              <a14:hiddenFill xmlns:a14="http://schemas.microsoft.com/office/drawing/2010/main">
+                <a:solidFill>
+                  <a:srgbClr val="FFFFFF"/>
+                </a:solidFill>
+              </a14:hiddenFill>
+            </a:ext>
+          </a:extLst>
+        </p:spPr>
+      </p:pic>
+      <p:pic>
+        <p:nvPicPr>
+          <p:cNvPr id="1036" name="Picture 12" descr="King's College London logo square transparent PNG - StickPNG">
+            <a:extLst>
+              <a:ext uri="{FF2B5EF4-FFF2-40B4-BE49-F238E27FC236}">
+                <a16:creationId xmlns:a16="http://schemas.microsoft.com/office/drawing/2014/main" id="{950258E1-6605-5B1F-92C4-FB3B0D52AD10}"/>
+              </a:ext>
+            </a:extLst>
+          </p:cNvPr>
+          <p:cNvPicPr>
+            <a:picLocks noChangeAspect="1" noChangeArrowheads="1"/>
+          </p:cNvPicPr>
+          <p:nvPr/>
+        </p:nvPicPr>
+        <p:blipFill rotWithShape="1">
+          <a:blip r:embed="rId5">
+            <a:extLst>
+              <a:ext uri="{28A0092B-C50C-407E-A947-70E740481C1C}">
+                <a14:useLocalDpi xmlns:a14="http://schemas.microsoft.com/office/drawing/2010/main" val="0"/>
+              </a:ext>
+            </a:extLst>
+          </a:blip>
+          <a:srcRect l="27900" t="8805" r="27484" b="8897"/>
+          <a:stretch>
+            <a:fillRect/>
+          </a:stretch>
+        </p:blipFill>
+        <p:spPr bwMode="auto">
+          <a:xfrm>
+            <a:off x="4171179" y="3323939"/>
+            <a:ext cx="1756545" cy="1703663"/>
+          </a:xfrm>
+          <a:prstGeom prst="rect">
+            <a:avLst/>
+          </a:prstGeom>
+          <a:noFill/>
+          <a:extLst>
+            <a:ext uri="{909E8E84-426E-40DD-AFC4-6F175D3DCCD1}">
+              <a14:hiddenFill xmlns:a14="http://schemas.microsoft.com/office/drawing/2010/main">
+                <a:solidFill>
+                  <a:srgbClr val="FFFFFF"/>
+                </a:solidFill>
+              </a14:hiddenFill>
+            </a:ext>
+          </a:extLst>
+        </p:spPr>
+      </p:pic>
+      <p:pic>
+        <p:nvPicPr>
+          <p:cNvPr id="1028" name="Picture 4" descr="University of Alberta">
+            <a:extLst>
+              <a:ext uri="{FF2B5EF4-FFF2-40B4-BE49-F238E27FC236}">
+                <a16:creationId xmlns:a16="http://schemas.microsoft.com/office/drawing/2014/main" id="{41634EDE-7A51-D7D8-1E3E-319771FA1F9F}"/>
+              </a:ext>
+            </a:extLst>
+          </p:cNvPr>
+          <p:cNvPicPr>
+            <a:picLocks noChangeAspect="1" noChangeArrowheads="1"/>
+          </p:cNvPicPr>
+          <p:nvPr/>
+        </p:nvPicPr>
+        <p:blipFill>
+          <a:blip r:embed="rId6">
+            <a:extLst>
+              <a:ext uri="{28A0092B-C50C-407E-A947-70E740481C1C}">
+                <a14:useLocalDpi xmlns:a14="http://schemas.microsoft.com/office/drawing/2010/main" val="0"/>
+              </a:ext>
+            </a:extLst>
+          </a:blip>
+          <a:srcRect/>
+          <a:stretch>
+            <a:fillRect/>
+          </a:stretch>
+        </p:blipFill>
+        <p:spPr bwMode="auto">
+          <a:xfrm>
+            <a:off x="27171" y="-40139"/>
+            <a:ext cx="3648352" cy="1900428"/>
+          </a:xfrm>
+          <a:prstGeom prst="rect">
+            <a:avLst/>
+          </a:prstGeom>
+          <a:noFill/>
+          <a:extLst>
+            <a:ext uri="{909E8E84-426E-40DD-AFC4-6F175D3DCCD1}">
+              <a14:hiddenFill xmlns:a14="http://schemas.microsoft.com/office/drawing/2010/main">
+                <a:solidFill>
+                  <a:srgbClr val="FFFFFF"/>
+                </a:solidFill>
+              </a14:hiddenFill>
+            </a:ext>
+          </a:extLst>
+        </p:spPr>
+      </p:pic>
+      <p:pic>
+        <p:nvPicPr>
+          <p:cNvPr id="1030" name="Picture 6" descr="The Berkeley Lab Brand">
+            <a:extLst>
+              <a:ext uri="{FF2B5EF4-FFF2-40B4-BE49-F238E27FC236}">
+                <a16:creationId xmlns:a16="http://schemas.microsoft.com/office/drawing/2014/main" id="{4327AD2E-425B-D28B-2EEE-4C1EA24B2D37}"/>
+              </a:ext>
+            </a:extLst>
+          </p:cNvPr>
+          <p:cNvPicPr>
+            <a:picLocks noChangeAspect="1" noChangeArrowheads="1"/>
+          </p:cNvPicPr>
+          <p:nvPr/>
+        </p:nvPicPr>
+        <p:blipFill>
+          <a:blip r:embed="rId7">
+            <a:extLst>
+              <a:ext uri="{28A0092B-C50C-407E-A947-70E740481C1C}">
+                <a14:useLocalDpi xmlns:a14="http://schemas.microsoft.com/office/drawing/2010/main" val="0"/>
+              </a:ext>
+            </a:extLst>
+          </a:blip>
+          <a:srcRect/>
+          <a:stretch>
+            <a:fillRect/>
+          </a:stretch>
+        </p:blipFill>
+        <p:spPr bwMode="auto">
+          <a:xfrm>
+            <a:off x="132580" y="1580641"/>
+            <a:ext cx="4038599" cy="1103642"/>
+          </a:xfrm>
+          <a:prstGeom prst="rect">
+            <a:avLst/>
+          </a:prstGeom>
+          <a:noFill/>
+          <a:extLst>
+            <a:ext uri="{909E8E84-426E-40DD-AFC4-6F175D3DCCD1}">
+              <a14:hiddenFill xmlns:a14="http://schemas.microsoft.com/office/drawing/2010/main">
+                <a:solidFill>
+                  <a:srgbClr val="FFFFFF"/>
+                </a:solidFill>
+              </a14:hiddenFill>
+            </a:ext>
+          </a:extLst>
+        </p:spPr>
+      </p:pic>
+      <p:pic>
+        <p:nvPicPr>
+          <p:cNvPr id="1032" name="Picture 8" descr="LIP - Início">
+            <a:extLst>
+              <a:ext uri="{FF2B5EF4-FFF2-40B4-BE49-F238E27FC236}">
+                <a16:creationId xmlns:a16="http://schemas.microsoft.com/office/drawing/2014/main" id="{602433BE-EC62-9934-DBD4-750ED756412D}"/>
+              </a:ext>
+            </a:extLst>
+          </p:cNvPr>
+          <p:cNvPicPr>
+            <a:picLocks noChangeAspect="1" noChangeArrowheads="1"/>
+          </p:cNvPicPr>
+          <p:nvPr/>
+        </p:nvPicPr>
+        <p:blipFill>
+          <a:blip r:embed="rId8">
+            <a:extLst>
+              <a:ext uri="{28A0092B-C50C-407E-A947-70E740481C1C}">
+                <a14:useLocalDpi xmlns:a14="http://schemas.microsoft.com/office/drawing/2010/main" val="0"/>
+              </a:ext>
+            </a:extLst>
+          </a:blip>
+          <a:srcRect/>
+          <a:stretch>
+            <a:fillRect/>
+          </a:stretch>
+        </p:blipFill>
+        <p:spPr bwMode="auto">
+          <a:xfrm>
+            <a:off x="7431235" y="5204138"/>
+            <a:ext cx="2196964" cy="1482951"/>
+          </a:xfrm>
+          <a:prstGeom prst="rect">
+            <a:avLst/>
+          </a:prstGeom>
+          <a:noFill/>
+          <a:extLst>
+            <a:ext uri="{909E8E84-426E-40DD-AFC4-6F175D3DCCD1}">
+              <a14:hiddenFill xmlns:a14="http://schemas.microsoft.com/office/drawing/2010/main">
+                <a:solidFill>
+                  <a:srgbClr val="FFFFFF"/>
+                </a:solidFill>
+              </a14:hiddenFill>
+            </a:ext>
+          </a:extLst>
+        </p:spPr>
+      </p:pic>
+      <p:pic>
+        <p:nvPicPr>
+          <p:cNvPr id="1034" name="Picture 10" descr="UC Berkeley Logo, symbol, meaning, history, PNG, brand">
+            <a:extLst>
+              <a:ext uri="{FF2B5EF4-FFF2-40B4-BE49-F238E27FC236}">
+                <a16:creationId xmlns:a16="http://schemas.microsoft.com/office/drawing/2014/main" id="{C97EA02A-9DC7-03C6-91E6-DD702D17AF8E}"/>
+              </a:ext>
+            </a:extLst>
+          </p:cNvPr>
+          <p:cNvPicPr>
+            <a:picLocks noChangeAspect="1" noChangeArrowheads="1"/>
+          </p:cNvPicPr>
+          <p:nvPr/>
+        </p:nvPicPr>
+        <p:blipFill>
+          <a:blip r:embed="rId9">
+            <a:extLst>
+              <a:ext uri="{28A0092B-C50C-407E-A947-70E740481C1C}">
+                <a14:useLocalDpi xmlns:a14="http://schemas.microsoft.com/office/drawing/2010/main" val="0"/>
+              </a:ext>
+            </a:extLst>
+          </a:blip>
+          <a:srcRect/>
+          <a:stretch>
+            <a:fillRect/>
+          </a:stretch>
+        </p:blipFill>
+        <p:spPr bwMode="auto">
+          <a:xfrm>
+            <a:off x="173682" y="3429000"/>
+            <a:ext cx="3638648" cy="2046739"/>
+          </a:xfrm>
+          <a:prstGeom prst="rect">
+            <a:avLst/>
+          </a:prstGeom>
+          <a:noFill/>
+          <a:extLst>
+            <a:ext uri="{909E8E84-426E-40DD-AFC4-6F175D3DCCD1}">
+              <a14:hiddenFill xmlns:a14="http://schemas.microsoft.com/office/drawing/2010/main">
+                <a:solidFill>
+                  <a:srgbClr val="FFFFFF"/>
+                </a:solidFill>
+              </a14:hiddenFill>
+            </a:ext>
+          </a:extLst>
+        </p:spPr>
+      </p:pic>
+      <p:pic>
+        <p:nvPicPr>
+          <p:cNvPr id="1038" name="Picture 14" descr="Brand Kit | TRIUMF – Canada's Particle Accelerator Centre – TRIUMF">
+            <a:extLst>
+              <a:ext uri="{FF2B5EF4-FFF2-40B4-BE49-F238E27FC236}">
+                <a16:creationId xmlns:a16="http://schemas.microsoft.com/office/drawing/2014/main" id="{153ED3E3-58D9-7D33-6CB3-1621C7C7D550}"/>
+              </a:ext>
+            </a:extLst>
+          </p:cNvPr>
+          <p:cNvPicPr>
+            <a:picLocks noGrp="1" noChangeAspect="1" noChangeArrowheads="1"/>
+          </p:cNvPicPr>
+          <p:nvPr>
+            <p:ph idx="1"/>
+          </p:nvPr>
+        </p:nvPicPr>
+        <p:blipFill>
+          <a:blip r:embed="rId10">
+            <a:extLst>
+              <a:ext uri="{28A0092B-C50C-407E-A947-70E740481C1C}">
+                <a14:useLocalDpi xmlns:a14="http://schemas.microsoft.com/office/drawing/2010/main" val="0"/>
+              </a:ext>
+            </a:extLst>
+          </a:blip>
+          <a:srcRect/>
+          <a:stretch>
+            <a:fillRect/>
+          </a:stretch>
+        </p:blipFill>
+        <p:spPr bwMode="auto">
+          <a:xfrm>
+            <a:off x="7805761" y="3601048"/>
+            <a:ext cx="4038599" cy="735576"/>
+          </a:xfrm>
+          <a:prstGeom prst="rect">
+            <a:avLst/>
+          </a:prstGeom>
+          <a:noFill/>
+          <a:extLst>
+            <a:ext uri="{909E8E84-426E-40DD-AFC4-6F175D3DCCD1}">
+              <a14:hiddenFill xmlns:a14="http://schemas.microsoft.com/office/drawing/2010/main">
+                <a:solidFill>
+                  <a:srgbClr val="FFFFFF"/>
+                </a:solidFill>
+              </a14:hiddenFill>
+            </a:ext>
+          </a:extLst>
+        </p:spPr>
+      </p:pic>
+      <p:pic>
+        <p:nvPicPr>
+          <p:cNvPr id="1040" name="Picture 16" descr="Queen's Logo | Queen's Encyclopedia">
+            <a:extLst>
+              <a:ext uri="{FF2B5EF4-FFF2-40B4-BE49-F238E27FC236}">
+                <a16:creationId xmlns:a16="http://schemas.microsoft.com/office/drawing/2014/main" id="{AEB70865-352E-7E60-75C0-C041EBF47452}"/>
+              </a:ext>
+            </a:extLst>
+          </p:cNvPr>
+          <p:cNvPicPr>
+            <a:picLocks noChangeAspect="1" noChangeArrowheads="1"/>
+          </p:cNvPicPr>
+          <p:nvPr/>
+        </p:nvPicPr>
+        <p:blipFill>
+          <a:blip r:embed="rId11">
+            <a:extLst>
+              <a:ext uri="{28A0092B-C50C-407E-A947-70E740481C1C}">
+                <a14:useLocalDpi xmlns:a14="http://schemas.microsoft.com/office/drawing/2010/main" val="0"/>
+              </a:ext>
+            </a:extLst>
+          </a:blip>
+          <a:srcRect/>
+          <a:stretch>
+            <a:fillRect/>
+          </a:stretch>
+        </p:blipFill>
+        <p:spPr bwMode="auto">
+          <a:xfrm>
+            <a:off x="6463876" y="-14598"/>
+            <a:ext cx="3096078" cy="2354349"/>
+          </a:xfrm>
+          <a:prstGeom prst="rect">
+            <a:avLst/>
+          </a:prstGeom>
+          <a:noFill/>
+          <a:extLst>
+            <a:ext uri="{909E8E84-426E-40DD-AFC4-6F175D3DCCD1}">
+              <a14:hiddenFill xmlns:a14="http://schemas.microsoft.com/office/drawing/2010/main">
+                <a:solidFill>
+                  <a:srgbClr val="FFFFFF"/>
+                </a:solidFill>
+              </a14:hiddenFill>
+            </a:ext>
+          </a:extLst>
+        </p:spPr>
+      </p:pic>
+      <p:pic>
+        <p:nvPicPr>
+          <p:cNvPr id="1046" name="Picture 22" descr="University Of Oxford Logo PNG Images - CleanPNG">
+            <a:extLst>
+              <a:ext uri="{FF2B5EF4-FFF2-40B4-BE49-F238E27FC236}">
+                <a16:creationId xmlns:a16="http://schemas.microsoft.com/office/drawing/2014/main" id="{FC0CBA7B-6762-C115-D13E-D8E371AB6C2A}"/>
+              </a:ext>
+            </a:extLst>
+          </p:cNvPr>
+          <p:cNvPicPr>
+            <a:picLocks noChangeAspect="1" noChangeArrowheads="1"/>
+          </p:cNvPicPr>
+          <p:nvPr/>
+        </p:nvPicPr>
+        <p:blipFill rotWithShape="1">
+          <a:blip r:embed="rId12">
+            <a:extLst>
+              <a:ext uri="{28A0092B-C50C-407E-A947-70E740481C1C}">
+                <a14:useLocalDpi xmlns:a14="http://schemas.microsoft.com/office/drawing/2010/main" val="0"/>
+              </a:ext>
+            </a:extLst>
+          </a:blip>
+          <a:srcRect l="11555" t="16596" r="10795" b="10737"/>
+          <a:stretch>
+            <a:fillRect/>
+          </a:stretch>
+        </p:blipFill>
+        <p:spPr bwMode="auto">
+          <a:xfrm>
+            <a:off x="9825061" y="4622767"/>
+            <a:ext cx="2218873" cy="2076482"/>
+          </a:xfrm>
+          <a:prstGeom prst="rect">
+            <a:avLst/>
+          </a:prstGeom>
+          <a:noFill/>
+          <a:extLst>
+            <a:ext uri="{909E8E84-426E-40DD-AFC4-6F175D3DCCD1}">
+              <a14:hiddenFill xmlns:a14="http://schemas.microsoft.com/office/drawing/2010/main">
+                <a:solidFill>
+                  <a:srgbClr val="FFFFFF"/>
+                </a:solidFill>
+              </a14:hiddenFill>
+            </a:ext>
+          </a:extLst>
+        </p:spPr>
+      </p:pic>
+      <p:pic>
+        <p:nvPicPr>
+          <p:cNvPr id="1048" name="Picture 24" descr="University of Pennsylvania | King's College London">
+            <a:extLst>
+              <a:ext uri="{FF2B5EF4-FFF2-40B4-BE49-F238E27FC236}">
+                <a16:creationId xmlns:a16="http://schemas.microsoft.com/office/drawing/2014/main" id="{71BC6DF4-8764-8480-894A-30CF9163E875}"/>
+              </a:ext>
+            </a:extLst>
+          </p:cNvPr>
+          <p:cNvPicPr>
+            <a:picLocks noChangeAspect="1" noChangeArrowheads="1"/>
+          </p:cNvPicPr>
+          <p:nvPr/>
+        </p:nvPicPr>
+        <p:blipFill>
+          <a:blip r:embed="rId13">
+            <a:extLst>
+              <a:ext uri="{28A0092B-C50C-407E-A947-70E740481C1C}">
+                <a14:useLocalDpi xmlns:a14="http://schemas.microsoft.com/office/drawing/2010/main" val="0"/>
+              </a:ext>
+            </a:extLst>
+          </a:blip>
+          <a:srcRect/>
+          <a:stretch>
+            <a:fillRect/>
+          </a:stretch>
+        </p:blipFill>
+        <p:spPr bwMode="auto">
+          <a:xfrm>
+            <a:off x="4517214" y="2068646"/>
+            <a:ext cx="3218346" cy="1052248"/>
+          </a:xfrm>
+          <a:prstGeom prst="rect">
+            <a:avLst/>
+          </a:prstGeom>
+          <a:noFill/>
+          <a:extLst>
+            <a:ext uri="{909E8E84-426E-40DD-AFC4-6F175D3DCCD1}">
+              <a14:hiddenFill xmlns:a14="http://schemas.microsoft.com/office/drawing/2010/main">
+                <a:solidFill>
+                  <a:srgbClr val="FFFFFF"/>
+                </a:solidFill>
+              </a14:hiddenFill>
+            </a:ext>
+          </a:extLst>
+        </p:spPr>
+      </p:pic>
+      <p:pic>
+        <p:nvPicPr>
+          <p:cNvPr id="1050" name="Picture 26" descr="Laurentian University - Ontario Virtual School">
+            <a:extLst>
+              <a:ext uri="{FF2B5EF4-FFF2-40B4-BE49-F238E27FC236}">
+                <a16:creationId xmlns:a16="http://schemas.microsoft.com/office/drawing/2014/main" id="{BACC7277-F2D9-8556-47AB-4F94F8C8B6D5}"/>
+              </a:ext>
+            </a:extLst>
+          </p:cNvPr>
+          <p:cNvPicPr>
+            <a:picLocks noChangeAspect="1" noChangeArrowheads="1"/>
+          </p:cNvPicPr>
+          <p:nvPr/>
+        </p:nvPicPr>
+        <p:blipFill>
+          <a:blip r:embed="rId14">
+            <a:extLst>
+              <a:ext uri="{28A0092B-C50C-407E-A947-70E740481C1C}">
+                <a14:useLocalDpi xmlns:a14="http://schemas.microsoft.com/office/drawing/2010/main" val="0"/>
+              </a:ext>
+            </a:extLst>
+          </a:blip>
+          <a:srcRect/>
+          <a:stretch>
+            <a:fillRect/>
+          </a:stretch>
+        </p:blipFill>
+        <p:spPr bwMode="auto">
+          <a:xfrm>
+            <a:off x="2848267" y="5267286"/>
+            <a:ext cx="4215210" cy="907807"/>
+          </a:xfrm>
+          <a:prstGeom prst="rect">
+            <a:avLst/>
+          </a:prstGeom>
+          <a:noFill/>
+          <a:extLst>
+            <a:ext uri="{909E8E84-426E-40DD-AFC4-6F175D3DCCD1}">
+              <a14:hiddenFill xmlns:a14="http://schemas.microsoft.com/office/drawing/2010/main">
+                <a:solidFill>
+                  <a:srgbClr val="FFFFFF"/>
+                </a:solidFill>
+              </a14:hiddenFill>
+            </a:ext>
+          </a:extLst>
+        </p:spPr>
+      </p:pic>
+      <p:pic>
+        <p:nvPicPr>
+          <p:cNvPr id="1054" name="Picture 30" descr="BNL | Brand Center | Logo">
+            <a:extLst>
+              <a:ext uri="{FF2B5EF4-FFF2-40B4-BE49-F238E27FC236}">
+                <a16:creationId xmlns:a16="http://schemas.microsoft.com/office/drawing/2014/main" id="{50AFF334-406A-1BCA-3668-CEF3BE8B2EA3}"/>
+              </a:ext>
+            </a:extLst>
+          </p:cNvPr>
+          <p:cNvPicPr>
+            <a:picLocks noChangeAspect="1" noChangeArrowheads="1"/>
+          </p:cNvPicPr>
+          <p:nvPr/>
+        </p:nvPicPr>
+        <p:blipFill>
+          <a:blip r:embed="rId15">
+            <a:extLst>
+              <a:ext uri="{28A0092B-C50C-407E-A947-70E740481C1C}">
+                <a14:useLocalDpi xmlns:a14="http://schemas.microsoft.com/office/drawing/2010/main" val="0"/>
+              </a:ext>
+            </a:extLst>
+          </a:blip>
+          <a:srcRect/>
+          <a:stretch>
+            <a:fillRect/>
+          </a:stretch>
+        </p:blipFill>
+        <p:spPr bwMode="auto">
+          <a:xfrm>
+            <a:off x="4423283" y="111891"/>
+            <a:ext cx="2040593" cy="1377831"/>
+          </a:xfrm>
+          <a:prstGeom prst="rect">
+            <a:avLst/>
+          </a:prstGeom>
+          <a:noFill/>
+          <a:extLst>
+            <a:ext uri="{909E8E84-426E-40DD-AFC4-6F175D3DCCD1}">
+              <a14:hiddenFill xmlns:a14="http://schemas.microsoft.com/office/drawing/2010/main">
+                <a:solidFill>
+                  <a:srgbClr val="FFFFFF"/>
+                </a:solidFill>
+              </a14:hiddenFill>
+            </a:ext>
+          </a:extLst>
+        </p:spPr>
+      </p:pic>
+      <p:pic>
+        <p:nvPicPr>
+          <p:cNvPr id="1056" name="Picture 32" descr="UNAM Logo and symbol, meaning, history, PNG, brand">
+            <a:extLst>
+              <a:ext uri="{FF2B5EF4-FFF2-40B4-BE49-F238E27FC236}">
+                <a16:creationId xmlns:a16="http://schemas.microsoft.com/office/drawing/2014/main" id="{2C63E33F-5D80-28A8-6C94-7C5AF8B327DF}"/>
+              </a:ext>
+            </a:extLst>
+          </p:cNvPr>
+          <p:cNvPicPr>
+            <a:picLocks noChangeAspect="1" noChangeArrowheads="1"/>
+          </p:cNvPicPr>
+          <p:nvPr/>
+        </p:nvPicPr>
+        <p:blipFill>
+          <a:blip r:embed="rId16">
+            <a:extLst>
+              <a:ext uri="{28A0092B-C50C-407E-A947-70E740481C1C}">
+                <a14:useLocalDpi xmlns:a14="http://schemas.microsoft.com/office/drawing/2010/main" val="0"/>
+              </a:ext>
+            </a:extLst>
+          </a:blip>
+          <a:srcRect/>
+          <a:stretch>
+            <a:fillRect/>
+          </a:stretch>
+        </p:blipFill>
+        <p:spPr bwMode="auto">
+          <a:xfrm>
+            <a:off x="5423620" y="3380141"/>
+            <a:ext cx="2929085" cy="1647610"/>
+          </a:xfrm>
+          <a:prstGeom prst="rect">
+            <a:avLst/>
+          </a:prstGeom>
+          <a:noFill/>
+          <a:extLst>
+            <a:ext uri="{909E8E84-426E-40DD-AFC4-6F175D3DCCD1}">
+              <a14:hiddenFill xmlns:a14="http://schemas.microsoft.com/office/drawing/2010/main">
+                <a:solidFill>
+                  <a:srgbClr val="FFFFFF"/>
+                </a:solidFill>
+              </a14:hiddenFill>
+            </a:ext>
+          </a:extLst>
+        </p:spPr>
+      </p:pic>
+      <p:pic>
+        <p:nvPicPr>
+          <p:cNvPr id="1058" name="Picture 34" descr="Description of some logo of TU Dresden — TU Dresden — TU Dresden">
+            <a:extLst>
+              <a:ext uri="{FF2B5EF4-FFF2-40B4-BE49-F238E27FC236}">
+                <a16:creationId xmlns:a16="http://schemas.microsoft.com/office/drawing/2014/main" id="{452DBE05-9689-EBB1-ACDD-185FC40C846E}"/>
+              </a:ext>
+            </a:extLst>
+          </p:cNvPr>
+          <p:cNvPicPr>
+            <a:picLocks noChangeAspect="1" noChangeArrowheads="1"/>
+          </p:cNvPicPr>
+          <p:nvPr/>
+        </p:nvPicPr>
+        <p:blipFill>
+          <a:blip r:embed="rId17">
+            <a:extLst>
+              <a:ext uri="{28A0092B-C50C-407E-A947-70E740481C1C}">
+                <a14:useLocalDpi xmlns:a14="http://schemas.microsoft.com/office/drawing/2010/main" val="0"/>
+              </a:ext>
+            </a:extLst>
+          </a:blip>
+          <a:srcRect/>
+          <a:stretch>
+            <a:fillRect/>
+          </a:stretch>
+        </p:blipFill>
+        <p:spPr bwMode="auto">
+          <a:xfrm>
+            <a:off x="8970700" y="49173"/>
+            <a:ext cx="3250699" cy="1325563"/>
+          </a:xfrm>
+          <a:prstGeom prst="rect">
+            <a:avLst/>
+          </a:prstGeom>
+          <a:noFill/>
+          <a:extLst>
+            <a:ext uri="{909E8E84-426E-40DD-AFC4-6F175D3DCCD1}">
+              <a14:hiddenFill xmlns:a14="http://schemas.microsoft.com/office/drawing/2010/main">
+                <a:solidFill>
+                  <a:srgbClr val="FFFFFF"/>
+                </a:solidFill>
+              </a14:hiddenFill>
+            </a:ext>
+          </a:extLst>
+        </p:spPr>
+      </p:pic>
+    </p:spTree>
+    <p:extLst>
+      <p:ext uri="{BB962C8B-B14F-4D97-AF65-F5344CB8AC3E}">
+        <p14:creationId xmlns:p14="http://schemas.microsoft.com/office/powerpoint/2010/main" val="4025701779"/>
       </p:ext>
     </p:extLst>
   </p:cSld>
